--- a/eum_package/이음_발표자료_v2.pptx
+++ b/eum_package/이음_발표자료_v2.pptx
@@ -2970,7 +2970,7 @@
                 <a:ea typeface="Malgun Gothic" pitchFamily="34" charset="-122"/>
                 <a:cs typeface="Malgun Gothic" pitchFamily="34" charset="-120"/>
               </a:rPr>
-              <a:t>팀원  김재민 · 강원준 · 오수환</a:t>
+              <a:t>팀 E-um  ·  김재민 · 강원준 · 오수환</a:t>
             </a:r>
             <a:endParaRPr lang="en-US" sz="1200" dirty="0"/>
           </a:p>
@@ -11433,7 +11433,7 @@
                 <a:ea typeface="Malgun Gothic" pitchFamily="34" charset="-122"/>
                 <a:cs typeface="Malgun Gothic" pitchFamily="34" charset="-120"/>
               </a:rPr>
-              <a:t>팀 이음 — 김재민 · 강원준 · 오수환</a:t>
+              <a:t>팀 E-um — 김재민 · 강원준 · 오수환</a:t>
             </a:r>
             <a:endParaRPr lang="en-US" sz="1100" dirty="0"/>
           </a:p>
